--- a/curso/pptx/S21.pptx
+++ b/curso/pptx/S21.pptx
@@ -5233,7 +5233,7 @@
                 </a:solidFill>
                 <a:latin typeface="Nunito Sans"/>
               </a:rPr>
-              <a:t>Pasos sin razones</a:t>
+              <a:t>没有理由的步骤</a:t>
             </a:r>
           </a:p>
           <a:p>
@@ -5258,7 +5258,7 @@
                 </a:solidFill>
                 <a:latin typeface="Nunito Sans"/>
               </a:rPr>
-              <a:t>Final exagerado</a:t>
+              <a:t>夸大的结局</a:t>
             </a:r>
           </a:p>
           <a:p>
@@ -5283,7 +5283,7 @@
                 </a:solidFill>
                 <a:latin typeface="Nunito Sans"/>
               </a:rPr>
-              <a:t>Cada paso se da por seguro</a:t>
+              <a:t>把每一步都当成一定会发生</a:t>
             </a:r>
           </a:p>
         </p:txBody>
@@ -5413,7 +5413,7 @@
                 </a:solidFill>
                 <a:latin typeface="Nunito Sans"/>
               </a:rPr>
-              <a:t>Cada paso con razones</a:t>
+              <a:t>每一步都有理由</a:t>
             </a:r>
           </a:p>
           <a:p>
@@ -5438,7 +5438,7 @@
                 </a:solidFill>
                 <a:latin typeface="Nunito Sans"/>
               </a:rPr>
-              <a:t>Dice «puede pasar», no «pasará seguro»</a:t>
+              <a:t>说的是“可能发生”，不是“一定会发生”</a:t>
             </a:r>
           </a:p>
           <a:p>
@@ -5463,7 +5463,7 @@
                 </a:solidFill>
                 <a:latin typeface="Nunito Sans"/>
               </a:rPr>
-              <a:t>Se puede comprobar cada paso</a:t>
+              <a:t>每一步都可以核实</a:t>
             </a:r>
           </a:p>
         </p:txBody>
@@ -7257,7 +7257,7 @@
                 </a:solidFill>
                 <a:latin typeface="Nunito Sans"/>
               </a:rPr>
-              <a:t>Como un tobogán: si te subes, no puedes parar</a:t>
+              <a:t>就像滑梯：一旦上去，就停不下来</a:t>
             </a:r>
           </a:p>
           <a:p>
@@ -7282,7 +7282,7 @@
                 </a:solidFill>
                 <a:latin typeface="Nunito Sans"/>
               </a:rPr>
-              <a:t>Aunque cada paso sea posible, toda la cadena es poco probable</a:t>
+              <a:t>就算每一步都有可能，整个链条也很不可能</a:t>
             </a:r>
           </a:p>
           <a:p>
@@ -7307,7 +7307,7 @@
                 </a:solidFill>
                 <a:latin typeface="Nunito Sans"/>
               </a:rPr>
-              <a:t>Pregunta: </a:t>
+              <a:t>要问：</a:t>
             </a:r>
             <a:r>
               <a:rPr sz="2800" b="1">
@@ -7316,7 +7316,7 @@
                 </a:solidFill>
                 <a:latin typeface="Nunito Sans"/>
               </a:rPr>
-              <a:t>¿por qué un paso lleva seguro al siguiente?</a:t>
+              <a:t>为什么一步一定会导致下一步？</a:t>
             </a:r>
           </a:p>
         </p:txBody>
@@ -7468,7 +7468,7 @@
                 </a:solidFill>
                 <a:latin typeface="Nunito Sans"/>
               </a:rPr>
-              <a:t>Empieza con algo pequeño y acaba en algo </a:t>
+              <a:t>从小事开始，以</a:t>
             </a:r>
             <a:r>
               <a:rPr sz="2800" b="1">
@@ -7477,7 +7477,16 @@
                 </a:solidFill>
                 <a:latin typeface="Nunito Sans"/>
               </a:rPr>
-              <a:t>terrible</a:t>
+              <a:t>可怕</a:t>
+            </a:r>
+            <a:r>
+              <a:rPr sz="2800" b="0">
+                <a:solidFill>
+                  <a:srgbClr val="1F2A44"/>
+                </a:solidFill>
+                <a:latin typeface="Nunito Sans"/>
+              </a:rPr>
+              <a:t>的事结束</a:t>
             </a:r>
           </a:p>
           <a:p>
@@ -7502,7 +7511,7 @@
                 </a:solidFill>
                 <a:latin typeface="Nunito Sans"/>
               </a:rPr>
-              <a:t>Muchos «y entonces…» seguidos</a:t>
+              <a:t>很多“然后……”一个接一个</a:t>
             </a:r>
           </a:p>
           <a:p>
@@ -7527,7 +7536,7 @@
                 </a:solidFill>
                 <a:latin typeface="Nunito Sans"/>
               </a:rPr>
-              <a:t>Nadie explica </a:t>
+              <a:t>没有人解释</a:t>
             </a:r>
             <a:r>
               <a:rPr sz="2800" b="1">
@@ -7536,7 +7545,7 @@
                 </a:solidFill>
                 <a:latin typeface="Nunito Sans"/>
               </a:rPr>
-              <a:t>por qué</a:t>
+              <a:t>为什么</a:t>
             </a:r>
             <a:r>
               <a:rPr sz="2800" b="0">
@@ -7545,7 +7554,7 @@
                 </a:solidFill>
                 <a:latin typeface="Nunito Sans"/>
               </a:rPr>
-              <a:t> cada paso lleva al siguiente</a:t>
+              <a:t>每一步会导致下一步</a:t>
             </a:r>
           </a:p>
           <a:p>
@@ -7570,7 +7579,7 @@
                 </a:solidFill>
                 <a:latin typeface="Nunito Sans"/>
               </a:rPr>
-              <a:t>Se parece a la apelación al miedo: asusta con el final （第16课）</a:t>
+              <a:t>它有点像诉诸恐惧：用结局来吓人（第 16 课）</a:t>
             </a:r>
           </a:p>
         </p:txBody>

--- a/curso/pptx/S21.pptx
+++ b/curso/pptx/S21.pptx
@@ -4129,7 +4129,7 @@
                 </a:solidFill>
                 <a:latin typeface="Nunito Sans"/>
               </a:rPr>
-              <a:t>凯文：“如果我今天不做语文作业，我就会不及格，就会留级，就会辍学，就永远找不到工作。”</a:t>
+              <a:t>一个男孩：“如果我今天不做语文作业，我就会不及格，就会留级，就会辍学，就永远找不到工作。”</a:t>
             </a:r>
           </a:p>
         </p:txBody>
@@ -4438,7 +4438,7 @@
                 </a:solidFill>
                 <a:latin typeface="Nunito Sans"/>
               </a:rPr>
-              <a:t>奈亚拉的手机只剩 5% 的电：“如果我不充电，它今天下午就会关机，我训练完出来就没法通知我妈妈了。”</a:t>
+              <a:t>一个女孩的手机只剩 5% 的电：“如果我不充电，它今天下午就会关机，我训练完出来就没法通知我妈妈了。”</a:t>
             </a:r>
           </a:p>
         </p:txBody>
@@ -4747,7 +4747,7 @@
                 </a:solidFill>
                 <a:latin typeface="Nunito Sans"/>
               </a:rPr>
-              <a:t>迪伦：“如果你从‘只在聚会上’吸烟开始，很容易发展成每天都吸。尼古丁会让人上瘾。”</a:t>
+              <a:t>一个男孩：“如果你从‘只在聚会上’吸烟开始，很容易发展成每天都吸。尼古丁会让人上瘾。”</a:t>
             </a:r>
           </a:p>
         </p:txBody>
